--- a/ppt/course_project_agent_report/exports/course_project_agent_report_20260607_115339.pptx
+++ b/ppt/course_project_agent_report/exports/course_project_agent_report_20260607_115339.pptx
@@ -25025,7 +25025,7 @@
         </p:nvSpPr>
         <p:spPr>
           <a:xfrm>
-            <a:off x="0" y="0"/>
+            <a:off x="0" y="11430"/>
             <a:ext cx="12192000" cy="6858000"/>
           </a:xfrm>
           <a:prstGeom prst="rect">
@@ -28099,54 +28099,6 @@
           </p:sp>
         </p:grpSp>
       </p:grpSp>
-      <p:sp>
-        <p:nvSpPr>
-          <p:cNvPr id="89" name="TextBox 89"/>
-          <p:cNvSpPr txBox="1"/>
-          <p:nvPr/>
-        </p:nvSpPr>
-        <p:spPr>
-          <a:xfrm>
-            <a:off x="521970" y="6322695"/>
-            <a:ext cx="4043363" cy="182880"/>
-          </a:xfrm>
-          <a:prstGeom prst="rect">
-            <a:avLst/>
-          </a:prstGeom>
-          <a:noFill/>
-          <a:ln>
-            <a:noFill/>
-          </a:ln>
-        </p:spPr>
-        <p:txBody>
-          <a:bodyPr wrap="none" lIns="0" tIns="0" rIns="0" bIns="0" anchor="t" anchorCtr="0">
-            <a:spAutoFit/>
-          </a:bodyPr>
-          <a:lstStyle/>
-          <a:p>
-            <a:pPr algn="l"/>
-            <a:r>
-              <a:rPr lang="zh-CN" sz="900" dirty="0">
-                <a:solidFill>
-                  <a:srgbClr val="94A3B8"/>
-                </a:solidFill>
-                <a:latin typeface="Arial" panose="020B0604020202090204"/>
-                <a:ea typeface="微软雅黑"/>
-                <a:cs typeface="Arial" panose="020B0604020202090204"/>
-              </a:rPr>
-              <a:t>Source: svg_icon_agent/web_app.py, outputs/web/*/refined/*.svg</a:t>
-            </a:r>
-            <a:endParaRPr lang="zh-CN" sz="900" dirty="0">
-              <a:solidFill>
-                <a:srgbClr val="94A3B8"/>
-              </a:solidFill>
-              <a:latin typeface="Arial" panose="020B0604020202090204"/>
-              <a:ea typeface="微软雅黑"/>
-              <a:cs typeface="Arial" panose="020B0604020202090204"/>
-            </a:endParaRPr>
-          </a:p>
-        </p:txBody>
-      </p:sp>
       <p:sp>
         <p:nvSpPr>
           <p:cNvPr id="90" name="TextBox 90"/>
